--- a/public/fun/pack/pptx/talk/발표템플릿_13_업무보고_오월숲길.pptx
+++ b/public/fun/pack/pptx/talk/발표템플릿_13_업무보고_오월숲길.pptx
@@ -3347,7 +3347,7 @@
             <a:r>
               <a:rPr sz="3600" b="1" i="0">
                 <a:solidFill>
-                  <a:srgbClr val="143D21"/>
+                  <a:srgbClr val="1D7236"/>
                 </a:solidFill>
               </a:rPr>
               <a:t>발표 제목을 입력하세요</a:t>
@@ -3385,7 +3385,7 @@
             <a:r>
               <a:rPr sz="1700" b="0" i="1">
                 <a:solidFill>
-                  <a:srgbClr val="143D21"/>
+                  <a:srgbClr val="1D7236"/>
                 </a:solidFill>
               </a:rPr>
               <a:t>한 장 요약을 먼저 확인해 주십시오</a:t>
@@ -3460,7 +3460,7 @@
     <p:bg>
       <p:bgPr>
         <a:solidFill>
-          <a:srgbClr val="D0F1DA"/>
+          <a:srgbClr val="D4F7DE"/>
         </a:solidFill>
         <a:effectLst/>
       </p:bgPr>
@@ -3491,7 +3491,7 @@
           </a:solidFill>
           <a:ln w="25400">
             <a:solidFill>
-              <a:srgbClr val="2B8245"/>
+              <a:srgbClr val="43D66F"/>
             </a:solidFill>
             <a:prstDash val="dash"/>
           </a:ln>
@@ -3534,7 +3534,7 @@
             <a:r>
               <a:rPr sz="3000" b="1" i="0">
                 <a:solidFill>
-                  <a:srgbClr val="143D21"/>
+                  <a:srgbClr val="1D7236"/>
                 </a:solidFill>
               </a:rPr>
               <a:t>목차</a:t>
@@ -3559,11 +3559,11 @@
             </a:avLst>
           </a:prstGeom>
           <a:solidFill>
-            <a:srgbClr val="F0FAF3"/>
+            <a:srgbClr val="F3FCF6"/>
           </a:solidFill>
           <a:ln w="12700">
             <a:solidFill>
-              <a:srgbClr val="D0F1DA"/>
+              <a:srgbClr val="D4F7DE"/>
             </a:solidFill>
           </a:ln>
         </p:spPr>
@@ -3590,7 +3590,7 @@
             <a:avLst/>
           </a:prstGeom>
           <a:solidFill>
-            <a:srgbClr val="2B8245"/>
+            <a:srgbClr val="43D66F"/>
           </a:solidFill>
           <a:ln>
             <a:noFill/>
@@ -3648,7 +3648,7 @@
             <a:r>
               <a:rPr sz="1800" b="1" i="0">
                 <a:solidFill>
-                  <a:srgbClr val="143D21"/>
+                  <a:srgbClr val="1D7236"/>
                 </a:solidFill>
               </a:rPr>
               <a:t>추진 경과</a:t>
@@ -3711,11 +3711,11 @@
             </a:avLst>
           </a:prstGeom>
           <a:solidFill>
-            <a:srgbClr val="F0FAF3"/>
+            <a:srgbClr val="F3FCF6"/>
           </a:solidFill>
           <a:ln w="12700">
             <a:solidFill>
-              <a:srgbClr val="D0F1DA"/>
+              <a:srgbClr val="D4F7DE"/>
             </a:solidFill>
           </a:ln>
         </p:spPr>
@@ -3742,7 +3742,7 @@
             <a:avLst/>
           </a:prstGeom>
           <a:solidFill>
-            <a:srgbClr val="2B8245"/>
+            <a:srgbClr val="43D66F"/>
           </a:solidFill>
           <a:ln>
             <a:noFill/>
@@ -3800,7 +3800,7 @@
             <a:r>
               <a:rPr sz="1800" b="1" i="0">
                 <a:solidFill>
-                  <a:srgbClr val="143D21"/>
+                  <a:srgbClr val="1D7236"/>
                 </a:solidFill>
               </a:rPr>
               <a:t>주요 성과</a:t>
@@ -3863,11 +3863,11 @@
             </a:avLst>
           </a:prstGeom>
           <a:solidFill>
-            <a:srgbClr val="F0FAF3"/>
+            <a:srgbClr val="F3FCF6"/>
           </a:solidFill>
           <a:ln w="12700">
             <a:solidFill>
-              <a:srgbClr val="D0F1DA"/>
+              <a:srgbClr val="D4F7DE"/>
             </a:solidFill>
           </a:ln>
         </p:spPr>
@@ -3894,7 +3894,7 @@
             <a:avLst/>
           </a:prstGeom>
           <a:solidFill>
-            <a:srgbClr val="2B8245"/>
+            <a:srgbClr val="43D66F"/>
           </a:solidFill>
           <a:ln>
             <a:noFill/>
@@ -3952,7 +3952,7 @@
             <a:r>
               <a:rPr sz="1800" b="1" i="0">
                 <a:solidFill>
-                  <a:srgbClr val="143D21"/>
+                  <a:srgbClr val="1D7236"/>
                 </a:solidFill>
               </a:rPr>
               <a:t>이슈와 대응</a:t>
@@ -4015,11 +4015,11 @@
             </a:avLst>
           </a:prstGeom>
           <a:solidFill>
-            <a:srgbClr val="F0FAF3"/>
+            <a:srgbClr val="F3FCF6"/>
           </a:solidFill>
           <a:ln w="12700">
             <a:solidFill>
-              <a:srgbClr val="D0F1DA"/>
+              <a:srgbClr val="D4F7DE"/>
             </a:solidFill>
           </a:ln>
         </p:spPr>
@@ -4046,7 +4046,7 @@
             <a:avLst/>
           </a:prstGeom>
           <a:solidFill>
-            <a:srgbClr val="2B8245"/>
+            <a:srgbClr val="43D66F"/>
           </a:solidFill>
           <a:ln>
             <a:noFill/>
@@ -4104,7 +4104,7 @@
             <a:r>
               <a:rPr sz="1800" b="1" i="0">
                 <a:solidFill>
-                  <a:srgbClr val="143D21"/>
+                  <a:srgbClr val="1D7236"/>
                 </a:solidFill>
               </a:rPr>
               <a:t>향후 계획</a:t>
@@ -4164,7 +4164,7 @@
     <p:bg>
       <p:bgPr>
         <a:solidFill>
-          <a:srgbClr val="D0F1DA"/>
+          <a:srgbClr val="D4F7DE"/>
         </a:solidFill>
         <a:effectLst/>
       </p:bgPr>
@@ -4195,7 +4195,7 @@
           </a:solidFill>
           <a:ln w="25400">
             <a:solidFill>
-              <a:srgbClr val="2B8245"/>
+              <a:srgbClr val="43D66F"/>
             </a:solidFill>
             <a:prstDash val="dash"/>
           </a:ln>
@@ -4238,7 +4238,7 @@
             <a:r>
               <a:rPr sz="3000" b="1" i="0">
                 <a:solidFill>
-                  <a:srgbClr val="143D21"/>
+                  <a:srgbClr val="1D7236"/>
                 </a:solidFill>
               </a:rPr>
               <a:t>핵심 메시지</a:t>
@@ -4276,7 +4276,7 @@
             <a:r>
               <a:rPr sz="2600" b="1" i="0">
                 <a:solidFill>
-                  <a:srgbClr val="143D21"/>
+                  <a:srgbClr val="1D7236"/>
                 </a:solidFill>
               </a:rPr>
               <a:t>한 문장으로 말하면 — 여기에 핵심 메시지를 입력하세요</a:t>
@@ -4301,11 +4301,11 @@
             </a:avLst>
           </a:prstGeom>
           <a:solidFill>
-            <a:srgbClr val="F0FAF3"/>
+            <a:srgbClr val="F3FCF6"/>
           </a:solidFill>
           <a:ln w="15875">
             <a:solidFill>
-              <a:srgbClr val="D0F1DA"/>
+              <a:srgbClr val="D4F7DE"/>
             </a:solidFill>
           </a:ln>
         </p:spPr>
@@ -4332,7 +4332,7 @@
             <a:avLst/>
           </a:prstGeom>
           <a:solidFill>
-            <a:srgbClr val="2B8245"/>
+            <a:srgbClr val="43D66F"/>
           </a:solidFill>
           <a:ln>
             <a:noFill/>
@@ -4390,7 +4390,7 @@
             <a:r>
               <a:rPr sz="1800" b="1" i="0">
                 <a:solidFill>
-                  <a:srgbClr val="143D21"/>
+                  <a:srgbClr val="1D7236"/>
                 </a:solidFill>
               </a:rPr>
               <a:t>진행</a:t>
@@ -4468,11 +4468,11 @@
             </a:avLst>
           </a:prstGeom>
           <a:solidFill>
-            <a:srgbClr val="F0FAF3"/>
+            <a:srgbClr val="F3FCF6"/>
           </a:solidFill>
           <a:ln w="15875">
             <a:solidFill>
-              <a:srgbClr val="D0F1DA"/>
+              <a:srgbClr val="D4F7DE"/>
             </a:solidFill>
           </a:ln>
         </p:spPr>
@@ -4499,7 +4499,7 @@
             <a:avLst/>
           </a:prstGeom>
           <a:solidFill>
-            <a:srgbClr val="2B8245"/>
+            <a:srgbClr val="43D66F"/>
           </a:solidFill>
           <a:ln>
             <a:noFill/>
@@ -4557,7 +4557,7 @@
             <a:r>
               <a:rPr sz="1800" b="1" i="0">
                 <a:solidFill>
-                  <a:srgbClr val="143D21"/>
+                  <a:srgbClr val="1D7236"/>
                 </a:solidFill>
               </a:rPr>
               <a:t>성과</a:t>
@@ -4635,11 +4635,11 @@
             </a:avLst>
           </a:prstGeom>
           <a:solidFill>
-            <a:srgbClr val="F0FAF3"/>
+            <a:srgbClr val="F3FCF6"/>
           </a:solidFill>
           <a:ln w="15875">
             <a:solidFill>
-              <a:srgbClr val="D0F1DA"/>
+              <a:srgbClr val="D4F7DE"/>
             </a:solidFill>
           </a:ln>
         </p:spPr>
@@ -4666,7 +4666,7 @@
             <a:avLst/>
           </a:prstGeom>
           <a:solidFill>
-            <a:srgbClr val="2B8245"/>
+            <a:srgbClr val="43D66F"/>
           </a:solidFill>
           <a:ln>
             <a:noFill/>
@@ -4724,7 +4724,7 @@
             <a:r>
               <a:rPr sz="1800" b="1" i="0">
                 <a:solidFill>
-                  <a:srgbClr val="143D21"/>
+                  <a:srgbClr val="1D7236"/>
                 </a:solidFill>
               </a:rPr>
               <a:t>이슈</a:t>
@@ -4799,7 +4799,7 @@
     <p:bg>
       <p:bgPr>
         <a:solidFill>
-          <a:srgbClr val="D0F1DA"/>
+          <a:srgbClr val="D4F7DE"/>
         </a:solidFill>
         <a:effectLst/>
       </p:bgPr>
@@ -4830,7 +4830,7 @@
           </a:solidFill>
           <a:ln w="25400">
             <a:solidFill>
-              <a:srgbClr val="2B8245"/>
+              <a:srgbClr val="43D66F"/>
             </a:solidFill>
             <a:prstDash val="dash"/>
           </a:ln>
@@ -4873,7 +4873,7 @@
             <a:r>
               <a:rPr sz="3000" b="1" i="0">
                 <a:solidFill>
-                  <a:srgbClr val="143D21"/>
+                  <a:srgbClr val="1D7236"/>
                 </a:solidFill>
               </a:rPr>
               <a:t>한눈에 비교</a:t>
@@ -4898,11 +4898,11 @@
             </a:avLst>
           </a:prstGeom>
           <a:solidFill>
-            <a:srgbClr val="F0FAF3"/>
+            <a:srgbClr val="F3FCF6"/>
           </a:solidFill>
           <a:ln w="12700">
             <a:solidFill>
-              <a:srgbClr val="D0F1DA"/>
+              <a:srgbClr val="D4F7DE"/>
             </a:solidFill>
           </a:ln>
         </p:spPr>
@@ -4931,7 +4931,7 @@
             </a:avLst>
           </a:prstGeom>
           <a:solidFill>
-            <a:srgbClr val="2B8245"/>
+            <a:srgbClr val="43D66F"/>
           </a:solidFill>
           <a:ln>
             <a:noFill/>
@@ -5083,11 +5083,11 @@
             </a:avLst>
           </a:prstGeom>
           <a:solidFill>
-            <a:srgbClr val="D0F1DA"/>
+            <a:srgbClr val="D4F7DE"/>
           </a:solidFill>
           <a:ln w="12700">
             <a:solidFill>
-              <a:srgbClr val="D0F1DA"/>
+              <a:srgbClr val="D4F7DE"/>
             </a:solidFill>
           </a:ln>
         </p:spPr>
@@ -5116,7 +5116,7 @@
             </a:avLst>
           </a:prstGeom>
           <a:solidFill>
-            <a:srgbClr val="143D21"/>
+            <a:srgbClr val="1D7236"/>
           </a:solidFill>
           <a:ln>
             <a:noFill/>
@@ -5265,7 +5265,7 @@
     <p:bg>
       <p:bgPr>
         <a:solidFill>
-          <a:srgbClr val="D0F1DA"/>
+          <a:srgbClr val="D4F7DE"/>
         </a:solidFill>
         <a:effectLst/>
       </p:bgPr>
@@ -5296,7 +5296,7 @@
           </a:solidFill>
           <a:ln w="25400">
             <a:solidFill>
-              <a:srgbClr val="2B8245"/>
+              <a:srgbClr val="43D66F"/>
             </a:solidFill>
             <a:prstDash val="dash"/>
           </a:ln>
@@ -5339,7 +5339,7 @@
             <a:r>
               <a:rPr sz="3000" b="1" i="0">
                 <a:solidFill>
-                  <a:srgbClr val="143D21"/>
+                  <a:srgbClr val="1D7236"/>
                 </a:solidFill>
               </a:rPr>
               <a:t>일정·현황</a:t>
@@ -5391,30 +5391,30 @@
                   <a:tcPr anchor="ctr" marL="73152" marR="73152">
                     <a:lnL w="9525" cap="flat" cmpd="sng" algn="ctr">
                       <a:solidFill>
-                        <a:srgbClr val="2B8245"/>
+                        <a:srgbClr val="43D66F"/>
                       </a:solidFill>
                       <a:prstDash val="solid"/>
                     </a:lnL>
                     <a:lnR w="9525" cap="flat" cmpd="sng" algn="ctr">
                       <a:solidFill>
-                        <a:srgbClr val="2B8245"/>
+                        <a:srgbClr val="43D66F"/>
                       </a:solidFill>
                       <a:prstDash val="solid"/>
                     </a:lnR>
                     <a:lnT w="9525" cap="flat" cmpd="sng" algn="ctr">
                       <a:solidFill>
-                        <a:srgbClr val="2B8245"/>
+                        <a:srgbClr val="43D66F"/>
                       </a:solidFill>
                       <a:prstDash val="solid"/>
                     </a:lnT>
                     <a:lnB w="9525" cap="flat" cmpd="sng" algn="ctr">
                       <a:solidFill>
-                        <a:srgbClr val="2B8245"/>
+                        <a:srgbClr val="43D66F"/>
                       </a:solidFill>
                       <a:prstDash val="solid"/>
                     </a:lnB>
                     <a:solidFill>
-                      <a:srgbClr val="2B8245"/>
+                      <a:srgbClr val="43D66F"/>
                     </a:solidFill>
                   </a:tcPr>
                 </a:tc>
@@ -5437,30 +5437,30 @@
                   <a:tcPr anchor="ctr" marL="73152" marR="73152">
                     <a:lnL w="9525" cap="flat" cmpd="sng" algn="ctr">
                       <a:solidFill>
-                        <a:srgbClr val="2B8245"/>
+                        <a:srgbClr val="43D66F"/>
                       </a:solidFill>
                       <a:prstDash val="solid"/>
                     </a:lnL>
                     <a:lnR w="9525" cap="flat" cmpd="sng" algn="ctr">
                       <a:solidFill>
-                        <a:srgbClr val="2B8245"/>
+                        <a:srgbClr val="43D66F"/>
                       </a:solidFill>
                       <a:prstDash val="solid"/>
                     </a:lnR>
                     <a:lnT w="9525" cap="flat" cmpd="sng" algn="ctr">
                       <a:solidFill>
-                        <a:srgbClr val="2B8245"/>
+                        <a:srgbClr val="43D66F"/>
                       </a:solidFill>
                       <a:prstDash val="solid"/>
                     </a:lnT>
                     <a:lnB w="9525" cap="flat" cmpd="sng" algn="ctr">
                       <a:solidFill>
-                        <a:srgbClr val="2B8245"/>
+                        <a:srgbClr val="43D66F"/>
                       </a:solidFill>
                       <a:prstDash val="solid"/>
                     </a:lnB>
                     <a:solidFill>
-                      <a:srgbClr val="2B8245"/>
+                      <a:srgbClr val="43D66F"/>
                     </a:solidFill>
                   </a:tcPr>
                 </a:tc>
@@ -5483,30 +5483,30 @@
                   <a:tcPr anchor="ctr" marL="73152" marR="73152">
                     <a:lnL w="9525" cap="flat" cmpd="sng" algn="ctr">
                       <a:solidFill>
-                        <a:srgbClr val="2B8245"/>
+                        <a:srgbClr val="43D66F"/>
                       </a:solidFill>
                       <a:prstDash val="solid"/>
                     </a:lnL>
                     <a:lnR w="9525" cap="flat" cmpd="sng" algn="ctr">
                       <a:solidFill>
-                        <a:srgbClr val="2B8245"/>
+                        <a:srgbClr val="43D66F"/>
                       </a:solidFill>
                       <a:prstDash val="solid"/>
                     </a:lnR>
                     <a:lnT w="9525" cap="flat" cmpd="sng" algn="ctr">
                       <a:solidFill>
-                        <a:srgbClr val="2B8245"/>
+                        <a:srgbClr val="43D66F"/>
                       </a:solidFill>
                       <a:prstDash val="solid"/>
                     </a:lnT>
                     <a:lnB w="9525" cap="flat" cmpd="sng" algn="ctr">
                       <a:solidFill>
-                        <a:srgbClr val="2B8245"/>
+                        <a:srgbClr val="43D66F"/>
                       </a:solidFill>
                       <a:prstDash val="solid"/>
                     </a:lnB>
                     <a:solidFill>
-                      <a:srgbClr val="2B8245"/>
+                      <a:srgbClr val="43D66F"/>
                     </a:solidFill>
                   </a:tcPr>
                 </a:tc>
@@ -5529,30 +5529,30 @@
                   <a:tcPr anchor="ctr" marL="73152" marR="73152">
                     <a:lnL w="9525" cap="flat" cmpd="sng" algn="ctr">
                       <a:solidFill>
-                        <a:srgbClr val="2B8245"/>
+                        <a:srgbClr val="43D66F"/>
                       </a:solidFill>
                       <a:prstDash val="solid"/>
                     </a:lnL>
                     <a:lnR w="9525" cap="flat" cmpd="sng" algn="ctr">
                       <a:solidFill>
-                        <a:srgbClr val="2B8245"/>
+                        <a:srgbClr val="43D66F"/>
                       </a:solidFill>
                       <a:prstDash val="solid"/>
                     </a:lnR>
                     <a:lnT w="9525" cap="flat" cmpd="sng" algn="ctr">
                       <a:solidFill>
-                        <a:srgbClr val="2B8245"/>
+                        <a:srgbClr val="43D66F"/>
                       </a:solidFill>
                       <a:prstDash val="solid"/>
                     </a:lnT>
                     <a:lnB w="9525" cap="flat" cmpd="sng" algn="ctr">
                       <a:solidFill>
-                        <a:srgbClr val="2B8245"/>
+                        <a:srgbClr val="43D66F"/>
                       </a:solidFill>
                       <a:prstDash val="solid"/>
                     </a:lnB>
                     <a:solidFill>
-                      <a:srgbClr val="2B8245"/>
+                      <a:srgbClr val="43D66F"/>
                     </a:solidFill>
                   </a:tcPr>
                 </a:tc>
@@ -5567,7 +5567,7 @@
                       <a:r>
                         <a:rPr sz="1500" b="1">
                           <a:solidFill>
-                            <a:srgbClr val="143D21"/>
+                            <a:srgbClr val="1D7236"/>
                           </a:solidFill>
                         </a:rPr>
                         <a:t>1</a:t>
@@ -5577,30 +5577,30 @@
                   <a:tcPr anchor="ctr" marL="73152" marR="73152">
                     <a:lnL w="9525" cap="flat" cmpd="sng" algn="ctr">
                       <a:solidFill>
-                        <a:srgbClr val="D0F1DA"/>
+                        <a:srgbClr val="D4F7DE"/>
                       </a:solidFill>
                       <a:prstDash val="solid"/>
                     </a:lnL>
                     <a:lnR w="9525" cap="flat" cmpd="sng" algn="ctr">
                       <a:solidFill>
-                        <a:srgbClr val="D0F1DA"/>
+                        <a:srgbClr val="D4F7DE"/>
                       </a:solidFill>
                       <a:prstDash val="solid"/>
                     </a:lnR>
                     <a:lnT w="9525" cap="flat" cmpd="sng" algn="ctr">
                       <a:solidFill>
-                        <a:srgbClr val="D0F1DA"/>
+                        <a:srgbClr val="D4F7DE"/>
                       </a:solidFill>
                       <a:prstDash val="solid"/>
                     </a:lnT>
                     <a:lnB w="9525" cap="flat" cmpd="sng" algn="ctr">
                       <a:solidFill>
-                        <a:srgbClr val="D0F1DA"/>
+                        <a:srgbClr val="D4F7DE"/>
                       </a:solidFill>
                       <a:prstDash val="solid"/>
                     </a:lnB>
                     <a:solidFill>
-                      <a:srgbClr val="D0F1DA"/>
+                      <a:srgbClr val="D4F7DE"/>
                     </a:solidFill>
                   </a:tcPr>
                 </a:tc>
@@ -5623,25 +5623,25 @@
                   <a:tcPr anchor="ctr" marL="73152" marR="73152">
                     <a:lnL w="9525" cap="flat" cmpd="sng" algn="ctr">
                       <a:solidFill>
-                        <a:srgbClr val="D0F1DA"/>
+                        <a:srgbClr val="D4F7DE"/>
                       </a:solidFill>
                       <a:prstDash val="solid"/>
                     </a:lnL>
                     <a:lnR w="9525" cap="flat" cmpd="sng" algn="ctr">
                       <a:solidFill>
-                        <a:srgbClr val="D0F1DA"/>
+                        <a:srgbClr val="D4F7DE"/>
                       </a:solidFill>
                       <a:prstDash val="solid"/>
                     </a:lnR>
                     <a:lnT w="9525" cap="flat" cmpd="sng" algn="ctr">
                       <a:solidFill>
-                        <a:srgbClr val="D0F1DA"/>
+                        <a:srgbClr val="D4F7DE"/>
                       </a:solidFill>
                       <a:prstDash val="solid"/>
                     </a:lnT>
                     <a:lnB w="9525" cap="flat" cmpd="sng" algn="ctr">
                       <a:solidFill>
-                        <a:srgbClr val="D0F1DA"/>
+                        <a:srgbClr val="D4F7DE"/>
                       </a:solidFill>
                       <a:prstDash val="solid"/>
                     </a:lnB>
@@ -5669,25 +5669,25 @@
                   <a:tcPr anchor="ctr" marL="73152" marR="73152">
                     <a:lnL w="9525" cap="flat" cmpd="sng" algn="ctr">
                       <a:solidFill>
-                        <a:srgbClr val="D0F1DA"/>
+                        <a:srgbClr val="D4F7DE"/>
                       </a:solidFill>
                       <a:prstDash val="solid"/>
                     </a:lnL>
                     <a:lnR w="9525" cap="flat" cmpd="sng" algn="ctr">
                       <a:solidFill>
-                        <a:srgbClr val="D0F1DA"/>
+                        <a:srgbClr val="D4F7DE"/>
                       </a:solidFill>
                       <a:prstDash val="solid"/>
                     </a:lnR>
                     <a:lnT w="9525" cap="flat" cmpd="sng" algn="ctr">
                       <a:solidFill>
-                        <a:srgbClr val="D0F1DA"/>
+                        <a:srgbClr val="D4F7DE"/>
                       </a:solidFill>
                       <a:prstDash val="solid"/>
                     </a:lnT>
                     <a:lnB w="9525" cap="flat" cmpd="sng" algn="ctr">
                       <a:solidFill>
-                        <a:srgbClr val="D0F1DA"/>
+                        <a:srgbClr val="D4F7DE"/>
                       </a:solidFill>
                       <a:prstDash val="solid"/>
                     </a:lnB>
@@ -5715,25 +5715,25 @@
                   <a:tcPr anchor="ctr" marL="73152" marR="73152">
                     <a:lnL w="9525" cap="flat" cmpd="sng" algn="ctr">
                       <a:solidFill>
-                        <a:srgbClr val="D0F1DA"/>
+                        <a:srgbClr val="D4F7DE"/>
                       </a:solidFill>
                       <a:prstDash val="solid"/>
                     </a:lnL>
                     <a:lnR w="9525" cap="flat" cmpd="sng" algn="ctr">
                       <a:solidFill>
-                        <a:srgbClr val="D0F1DA"/>
+                        <a:srgbClr val="D4F7DE"/>
                       </a:solidFill>
                       <a:prstDash val="solid"/>
                     </a:lnR>
                     <a:lnT w="9525" cap="flat" cmpd="sng" algn="ctr">
                       <a:solidFill>
-                        <a:srgbClr val="D0F1DA"/>
+                        <a:srgbClr val="D4F7DE"/>
                       </a:solidFill>
                       <a:prstDash val="solid"/>
                     </a:lnT>
                     <a:lnB w="9525" cap="flat" cmpd="sng" algn="ctr">
                       <a:solidFill>
-                        <a:srgbClr val="D0F1DA"/>
+                        <a:srgbClr val="D4F7DE"/>
                       </a:solidFill>
                       <a:prstDash val="solid"/>
                     </a:lnB>
@@ -5753,7 +5753,7 @@
                       <a:r>
                         <a:rPr sz="1500" b="1">
                           <a:solidFill>
-                            <a:srgbClr val="143D21"/>
+                            <a:srgbClr val="1D7236"/>
                           </a:solidFill>
                         </a:rPr>
                         <a:t>2</a:t>
@@ -5763,30 +5763,30 @@
                   <a:tcPr anchor="ctr" marL="73152" marR="73152">
                     <a:lnL w="9525" cap="flat" cmpd="sng" algn="ctr">
                       <a:solidFill>
-                        <a:srgbClr val="D0F1DA"/>
+                        <a:srgbClr val="D4F7DE"/>
                       </a:solidFill>
                       <a:prstDash val="solid"/>
                     </a:lnL>
                     <a:lnR w="9525" cap="flat" cmpd="sng" algn="ctr">
                       <a:solidFill>
-                        <a:srgbClr val="D0F1DA"/>
+                        <a:srgbClr val="D4F7DE"/>
                       </a:solidFill>
                       <a:prstDash val="solid"/>
                     </a:lnR>
                     <a:lnT w="9525" cap="flat" cmpd="sng" algn="ctr">
                       <a:solidFill>
-                        <a:srgbClr val="D0F1DA"/>
+                        <a:srgbClr val="D4F7DE"/>
                       </a:solidFill>
                       <a:prstDash val="solid"/>
                     </a:lnT>
                     <a:lnB w="9525" cap="flat" cmpd="sng" algn="ctr">
                       <a:solidFill>
-                        <a:srgbClr val="D0F1DA"/>
+                        <a:srgbClr val="D4F7DE"/>
                       </a:solidFill>
                       <a:prstDash val="solid"/>
                     </a:lnB>
                     <a:solidFill>
-                      <a:srgbClr val="D0F1DA"/>
+                      <a:srgbClr val="D4F7DE"/>
                     </a:solidFill>
                   </a:tcPr>
                 </a:tc>
@@ -5809,30 +5809,30 @@
                   <a:tcPr anchor="ctr" marL="73152" marR="73152">
                     <a:lnL w="9525" cap="flat" cmpd="sng" algn="ctr">
                       <a:solidFill>
-                        <a:srgbClr val="D0F1DA"/>
+                        <a:srgbClr val="D4F7DE"/>
                       </a:solidFill>
                       <a:prstDash val="solid"/>
                     </a:lnL>
                     <a:lnR w="9525" cap="flat" cmpd="sng" algn="ctr">
                       <a:solidFill>
-                        <a:srgbClr val="D0F1DA"/>
+                        <a:srgbClr val="D4F7DE"/>
                       </a:solidFill>
                       <a:prstDash val="solid"/>
                     </a:lnR>
                     <a:lnT w="9525" cap="flat" cmpd="sng" algn="ctr">
                       <a:solidFill>
-                        <a:srgbClr val="D0F1DA"/>
+                        <a:srgbClr val="D4F7DE"/>
                       </a:solidFill>
                       <a:prstDash val="solid"/>
                     </a:lnT>
                     <a:lnB w="9525" cap="flat" cmpd="sng" algn="ctr">
                       <a:solidFill>
-                        <a:srgbClr val="D0F1DA"/>
+                        <a:srgbClr val="D4F7DE"/>
                       </a:solidFill>
                       <a:prstDash val="solid"/>
                     </a:lnB>
                     <a:solidFill>
-                      <a:srgbClr val="F0FAF3"/>
+                      <a:srgbClr val="F3FCF6"/>
                     </a:solidFill>
                   </a:tcPr>
                 </a:tc>
@@ -5855,30 +5855,30 @@
                   <a:tcPr anchor="ctr" marL="73152" marR="73152">
                     <a:lnL w="9525" cap="flat" cmpd="sng" algn="ctr">
                       <a:solidFill>
-                        <a:srgbClr val="D0F1DA"/>
+                        <a:srgbClr val="D4F7DE"/>
                       </a:solidFill>
                       <a:prstDash val="solid"/>
                     </a:lnL>
                     <a:lnR w="9525" cap="flat" cmpd="sng" algn="ctr">
                       <a:solidFill>
-                        <a:srgbClr val="D0F1DA"/>
+                        <a:srgbClr val="D4F7DE"/>
                       </a:solidFill>
                       <a:prstDash val="solid"/>
                     </a:lnR>
                     <a:lnT w="9525" cap="flat" cmpd="sng" algn="ctr">
                       <a:solidFill>
-                        <a:srgbClr val="D0F1DA"/>
+                        <a:srgbClr val="D4F7DE"/>
                       </a:solidFill>
                       <a:prstDash val="solid"/>
                     </a:lnT>
                     <a:lnB w="9525" cap="flat" cmpd="sng" algn="ctr">
                       <a:solidFill>
-                        <a:srgbClr val="D0F1DA"/>
+                        <a:srgbClr val="D4F7DE"/>
                       </a:solidFill>
                       <a:prstDash val="solid"/>
                     </a:lnB>
                     <a:solidFill>
-                      <a:srgbClr val="F0FAF3"/>
+                      <a:srgbClr val="F3FCF6"/>
                     </a:solidFill>
                   </a:tcPr>
                 </a:tc>
@@ -5901,30 +5901,30 @@
                   <a:tcPr anchor="ctr" marL="73152" marR="73152">
                     <a:lnL w="9525" cap="flat" cmpd="sng" algn="ctr">
                       <a:solidFill>
-                        <a:srgbClr val="D0F1DA"/>
+                        <a:srgbClr val="D4F7DE"/>
                       </a:solidFill>
                       <a:prstDash val="solid"/>
                     </a:lnL>
                     <a:lnR w="9525" cap="flat" cmpd="sng" algn="ctr">
                       <a:solidFill>
-                        <a:srgbClr val="D0F1DA"/>
+                        <a:srgbClr val="D4F7DE"/>
                       </a:solidFill>
                       <a:prstDash val="solid"/>
                     </a:lnR>
                     <a:lnT w="9525" cap="flat" cmpd="sng" algn="ctr">
                       <a:solidFill>
-                        <a:srgbClr val="D0F1DA"/>
+                        <a:srgbClr val="D4F7DE"/>
                       </a:solidFill>
                       <a:prstDash val="solid"/>
                     </a:lnT>
                     <a:lnB w="9525" cap="flat" cmpd="sng" algn="ctr">
                       <a:solidFill>
-                        <a:srgbClr val="D0F1DA"/>
+                        <a:srgbClr val="D4F7DE"/>
                       </a:solidFill>
                       <a:prstDash val="solid"/>
                     </a:lnB>
                     <a:solidFill>
-                      <a:srgbClr val="F0FAF3"/>
+                      <a:srgbClr val="F3FCF6"/>
                     </a:solidFill>
                   </a:tcPr>
                 </a:tc>
@@ -5939,7 +5939,7 @@
                       <a:r>
                         <a:rPr sz="1500" b="1">
                           <a:solidFill>
-                            <a:srgbClr val="143D21"/>
+                            <a:srgbClr val="1D7236"/>
                           </a:solidFill>
                         </a:rPr>
                         <a:t>3</a:t>
@@ -5949,30 +5949,30 @@
                   <a:tcPr anchor="ctr" marL="73152" marR="73152">
                     <a:lnL w="9525" cap="flat" cmpd="sng" algn="ctr">
                       <a:solidFill>
-                        <a:srgbClr val="D0F1DA"/>
+                        <a:srgbClr val="D4F7DE"/>
                       </a:solidFill>
                       <a:prstDash val="solid"/>
                     </a:lnL>
                     <a:lnR w="9525" cap="flat" cmpd="sng" algn="ctr">
                       <a:solidFill>
-                        <a:srgbClr val="D0F1DA"/>
+                        <a:srgbClr val="D4F7DE"/>
                       </a:solidFill>
                       <a:prstDash val="solid"/>
                     </a:lnR>
                     <a:lnT w="9525" cap="flat" cmpd="sng" algn="ctr">
                       <a:solidFill>
-                        <a:srgbClr val="D0F1DA"/>
+                        <a:srgbClr val="D4F7DE"/>
                       </a:solidFill>
                       <a:prstDash val="solid"/>
                     </a:lnT>
                     <a:lnB w="9525" cap="flat" cmpd="sng" algn="ctr">
                       <a:solidFill>
-                        <a:srgbClr val="D0F1DA"/>
+                        <a:srgbClr val="D4F7DE"/>
                       </a:solidFill>
                       <a:prstDash val="solid"/>
                     </a:lnB>
                     <a:solidFill>
-                      <a:srgbClr val="D0F1DA"/>
+                      <a:srgbClr val="D4F7DE"/>
                     </a:solidFill>
                   </a:tcPr>
                 </a:tc>
@@ -5995,25 +5995,25 @@
                   <a:tcPr anchor="ctr" marL="73152" marR="73152">
                     <a:lnL w="9525" cap="flat" cmpd="sng" algn="ctr">
                       <a:solidFill>
-                        <a:srgbClr val="D0F1DA"/>
+                        <a:srgbClr val="D4F7DE"/>
                       </a:solidFill>
                       <a:prstDash val="solid"/>
                     </a:lnL>
                     <a:lnR w="9525" cap="flat" cmpd="sng" algn="ctr">
                       <a:solidFill>
-                        <a:srgbClr val="D0F1DA"/>
+                        <a:srgbClr val="D4F7DE"/>
                       </a:solidFill>
                       <a:prstDash val="solid"/>
                     </a:lnR>
                     <a:lnT w="9525" cap="flat" cmpd="sng" algn="ctr">
                       <a:solidFill>
-                        <a:srgbClr val="D0F1DA"/>
+                        <a:srgbClr val="D4F7DE"/>
                       </a:solidFill>
                       <a:prstDash val="solid"/>
                     </a:lnT>
                     <a:lnB w="9525" cap="flat" cmpd="sng" algn="ctr">
                       <a:solidFill>
-                        <a:srgbClr val="D0F1DA"/>
+                        <a:srgbClr val="D4F7DE"/>
                       </a:solidFill>
                       <a:prstDash val="solid"/>
                     </a:lnB>
@@ -6041,25 +6041,25 @@
                   <a:tcPr anchor="ctr" marL="73152" marR="73152">
                     <a:lnL w="9525" cap="flat" cmpd="sng" algn="ctr">
                       <a:solidFill>
-                        <a:srgbClr val="D0F1DA"/>
+                        <a:srgbClr val="D4F7DE"/>
                       </a:solidFill>
                       <a:prstDash val="solid"/>
                     </a:lnL>
                     <a:lnR w="9525" cap="flat" cmpd="sng" algn="ctr">
                       <a:solidFill>
-                        <a:srgbClr val="D0F1DA"/>
+                        <a:srgbClr val="D4F7DE"/>
                       </a:solidFill>
                       <a:prstDash val="solid"/>
                     </a:lnR>
                     <a:lnT w="9525" cap="flat" cmpd="sng" algn="ctr">
                       <a:solidFill>
-                        <a:srgbClr val="D0F1DA"/>
+                        <a:srgbClr val="D4F7DE"/>
                       </a:solidFill>
                       <a:prstDash val="solid"/>
                     </a:lnT>
                     <a:lnB w="9525" cap="flat" cmpd="sng" algn="ctr">
                       <a:solidFill>
-                        <a:srgbClr val="D0F1DA"/>
+                        <a:srgbClr val="D4F7DE"/>
                       </a:solidFill>
                       <a:prstDash val="solid"/>
                     </a:lnB>
@@ -6087,25 +6087,25 @@
                   <a:tcPr anchor="ctr" marL="73152" marR="73152">
                     <a:lnL w="9525" cap="flat" cmpd="sng" algn="ctr">
                       <a:solidFill>
-                        <a:srgbClr val="D0F1DA"/>
+                        <a:srgbClr val="D4F7DE"/>
                       </a:solidFill>
                       <a:prstDash val="solid"/>
                     </a:lnL>
                     <a:lnR w="9525" cap="flat" cmpd="sng" algn="ctr">
                       <a:solidFill>
-                        <a:srgbClr val="D0F1DA"/>
+                        <a:srgbClr val="D4F7DE"/>
                       </a:solidFill>
                       <a:prstDash val="solid"/>
                     </a:lnR>
                     <a:lnT w="9525" cap="flat" cmpd="sng" algn="ctr">
                       <a:solidFill>
-                        <a:srgbClr val="D0F1DA"/>
+                        <a:srgbClr val="D4F7DE"/>
                       </a:solidFill>
                       <a:prstDash val="solid"/>
                     </a:lnT>
                     <a:lnB w="9525" cap="flat" cmpd="sng" algn="ctr">
                       <a:solidFill>
-                        <a:srgbClr val="D0F1DA"/>
+                        <a:srgbClr val="D4F7DE"/>
                       </a:solidFill>
                       <a:prstDash val="solid"/>
                     </a:lnB>
@@ -6125,7 +6125,7 @@
                       <a:r>
                         <a:rPr sz="1500" b="1">
                           <a:solidFill>
-                            <a:srgbClr val="143D21"/>
+                            <a:srgbClr val="1D7236"/>
                           </a:solidFill>
                         </a:rPr>
                         <a:t>4</a:t>
@@ -6135,30 +6135,30 @@
                   <a:tcPr anchor="ctr" marL="73152" marR="73152">
                     <a:lnL w="9525" cap="flat" cmpd="sng" algn="ctr">
                       <a:solidFill>
-                        <a:srgbClr val="D0F1DA"/>
+                        <a:srgbClr val="D4F7DE"/>
                       </a:solidFill>
                       <a:prstDash val="solid"/>
                     </a:lnL>
                     <a:lnR w="9525" cap="flat" cmpd="sng" algn="ctr">
                       <a:solidFill>
-                        <a:srgbClr val="D0F1DA"/>
+                        <a:srgbClr val="D4F7DE"/>
                       </a:solidFill>
                       <a:prstDash val="solid"/>
                     </a:lnR>
                     <a:lnT w="9525" cap="flat" cmpd="sng" algn="ctr">
                       <a:solidFill>
-                        <a:srgbClr val="D0F1DA"/>
+                        <a:srgbClr val="D4F7DE"/>
                       </a:solidFill>
                       <a:prstDash val="solid"/>
                     </a:lnT>
                     <a:lnB w="9525" cap="flat" cmpd="sng" algn="ctr">
                       <a:solidFill>
-                        <a:srgbClr val="D0F1DA"/>
+                        <a:srgbClr val="D4F7DE"/>
                       </a:solidFill>
                       <a:prstDash val="solid"/>
                     </a:lnB>
                     <a:solidFill>
-                      <a:srgbClr val="D0F1DA"/>
+                      <a:srgbClr val="D4F7DE"/>
                     </a:solidFill>
                   </a:tcPr>
                 </a:tc>
@@ -6181,30 +6181,30 @@
                   <a:tcPr anchor="ctr" marL="73152" marR="73152">
                     <a:lnL w="9525" cap="flat" cmpd="sng" algn="ctr">
                       <a:solidFill>
-                        <a:srgbClr val="D0F1DA"/>
+                        <a:srgbClr val="D4F7DE"/>
                       </a:solidFill>
                       <a:prstDash val="solid"/>
                     </a:lnL>
                     <a:lnR w="9525" cap="flat" cmpd="sng" algn="ctr">
                       <a:solidFill>
-                        <a:srgbClr val="D0F1DA"/>
+                        <a:srgbClr val="D4F7DE"/>
                       </a:solidFill>
                       <a:prstDash val="solid"/>
                     </a:lnR>
                     <a:lnT w="9525" cap="flat" cmpd="sng" algn="ctr">
                       <a:solidFill>
-                        <a:srgbClr val="D0F1DA"/>
+                        <a:srgbClr val="D4F7DE"/>
                       </a:solidFill>
                       <a:prstDash val="solid"/>
                     </a:lnT>
                     <a:lnB w="9525" cap="flat" cmpd="sng" algn="ctr">
                       <a:solidFill>
-                        <a:srgbClr val="D0F1DA"/>
+                        <a:srgbClr val="D4F7DE"/>
                       </a:solidFill>
                       <a:prstDash val="solid"/>
                     </a:lnB>
                     <a:solidFill>
-                      <a:srgbClr val="F0FAF3"/>
+                      <a:srgbClr val="F3FCF6"/>
                     </a:solidFill>
                   </a:tcPr>
                 </a:tc>
@@ -6227,30 +6227,30 @@
                   <a:tcPr anchor="ctr" marL="73152" marR="73152">
                     <a:lnL w="9525" cap="flat" cmpd="sng" algn="ctr">
                       <a:solidFill>
-                        <a:srgbClr val="D0F1DA"/>
+                        <a:srgbClr val="D4F7DE"/>
                       </a:solidFill>
                       <a:prstDash val="solid"/>
                     </a:lnL>
                     <a:lnR w="9525" cap="flat" cmpd="sng" algn="ctr">
                       <a:solidFill>
-                        <a:srgbClr val="D0F1DA"/>
+                        <a:srgbClr val="D4F7DE"/>
                       </a:solidFill>
                       <a:prstDash val="solid"/>
                     </a:lnR>
                     <a:lnT w="9525" cap="flat" cmpd="sng" algn="ctr">
                       <a:solidFill>
-                        <a:srgbClr val="D0F1DA"/>
+                        <a:srgbClr val="D4F7DE"/>
                       </a:solidFill>
                       <a:prstDash val="solid"/>
                     </a:lnT>
                     <a:lnB w="9525" cap="flat" cmpd="sng" algn="ctr">
                       <a:solidFill>
-                        <a:srgbClr val="D0F1DA"/>
+                        <a:srgbClr val="D4F7DE"/>
                       </a:solidFill>
                       <a:prstDash val="solid"/>
                     </a:lnB>
                     <a:solidFill>
-                      <a:srgbClr val="F0FAF3"/>
+                      <a:srgbClr val="F3FCF6"/>
                     </a:solidFill>
                   </a:tcPr>
                 </a:tc>
@@ -6273,30 +6273,30 @@
                   <a:tcPr anchor="ctr" marL="73152" marR="73152">
                     <a:lnL w="9525" cap="flat" cmpd="sng" algn="ctr">
                       <a:solidFill>
-                        <a:srgbClr val="D0F1DA"/>
+                        <a:srgbClr val="D4F7DE"/>
                       </a:solidFill>
                       <a:prstDash val="solid"/>
                     </a:lnL>
                     <a:lnR w="9525" cap="flat" cmpd="sng" algn="ctr">
                       <a:solidFill>
-                        <a:srgbClr val="D0F1DA"/>
+                        <a:srgbClr val="D4F7DE"/>
                       </a:solidFill>
                       <a:prstDash val="solid"/>
                     </a:lnR>
                     <a:lnT w="9525" cap="flat" cmpd="sng" algn="ctr">
                       <a:solidFill>
-                        <a:srgbClr val="D0F1DA"/>
+                        <a:srgbClr val="D4F7DE"/>
                       </a:solidFill>
                       <a:prstDash val="solid"/>
                     </a:lnT>
                     <a:lnB w="9525" cap="flat" cmpd="sng" algn="ctr">
                       <a:solidFill>
-                        <a:srgbClr val="D0F1DA"/>
+                        <a:srgbClr val="D4F7DE"/>
                       </a:solidFill>
                       <a:prstDash val="solid"/>
                     </a:lnB>
                     <a:solidFill>
-                      <a:srgbClr val="F0FAF3"/>
+                      <a:srgbClr val="F3FCF6"/>
                     </a:solidFill>
                   </a:tcPr>
                 </a:tc>
@@ -6311,7 +6311,7 @@
                       <a:r>
                         <a:rPr sz="1500" b="1">
                           <a:solidFill>
-                            <a:srgbClr val="143D21"/>
+                            <a:srgbClr val="1D7236"/>
                           </a:solidFill>
                         </a:rPr>
                         <a:t>5</a:t>
@@ -6321,30 +6321,30 @@
                   <a:tcPr anchor="ctr" marL="73152" marR="73152">
                     <a:lnL w="9525" cap="flat" cmpd="sng" algn="ctr">
                       <a:solidFill>
-                        <a:srgbClr val="D0F1DA"/>
+                        <a:srgbClr val="D4F7DE"/>
                       </a:solidFill>
                       <a:prstDash val="solid"/>
                     </a:lnL>
                     <a:lnR w="9525" cap="flat" cmpd="sng" algn="ctr">
                       <a:solidFill>
-                        <a:srgbClr val="D0F1DA"/>
+                        <a:srgbClr val="D4F7DE"/>
                       </a:solidFill>
                       <a:prstDash val="solid"/>
                     </a:lnR>
                     <a:lnT w="9525" cap="flat" cmpd="sng" algn="ctr">
                       <a:solidFill>
-                        <a:srgbClr val="D0F1DA"/>
+                        <a:srgbClr val="D4F7DE"/>
                       </a:solidFill>
                       <a:prstDash val="solid"/>
                     </a:lnT>
                     <a:lnB w="9525" cap="flat" cmpd="sng" algn="ctr">
                       <a:solidFill>
-                        <a:srgbClr val="D0F1DA"/>
+                        <a:srgbClr val="D4F7DE"/>
                       </a:solidFill>
                       <a:prstDash val="solid"/>
                     </a:lnB>
                     <a:solidFill>
-                      <a:srgbClr val="D0F1DA"/>
+                      <a:srgbClr val="D4F7DE"/>
                     </a:solidFill>
                   </a:tcPr>
                 </a:tc>
@@ -6367,25 +6367,25 @@
                   <a:tcPr anchor="ctr" marL="73152" marR="73152">
                     <a:lnL w="9525" cap="flat" cmpd="sng" algn="ctr">
                       <a:solidFill>
-                        <a:srgbClr val="D0F1DA"/>
+                        <a:srgbClr val="D4F7DE"/>
                       </a:solidFill>
                       <a:prstDash val="solid"/>
                     </a:lnL>
                     <a:lnR w="9525" cap="flat" cmpd="sng" algn="ctr">
                       <a:solidFill>
-                        <a:srgbClr val="D0F1DA"/>
+                        <a:srgbClr val="D4F7DE"/>
                       </a:solidFill>
                       <a:prstDash val="solid"/>
                     </a:lnR>
                     <a:lnT w="9525" cap="flat" cmpd="sng" algn="ctr">
                       <a:solidFill>
-                        <a:srgbClr val="D0F1DA"/>
+                        <a:srgbClr val="D4F7DE"/>
                       </a:solidFill>
                       <a:prstDash val="solid"/>
                     </a:lnT>
                     <a:lnB w="9525" cap="flat" cmpd="sng" algn="ctr">
                       <a:solidFill>
-                        <a:srgbClr val="D0F1DA"/>
+                        <a:srgbClr val="D4F7DE"/>
                       </a:solidFill>
                       <a:prstDash val="solid"/>
                     </a:lnB>
@@ -6413,25 +6413,25 @@
                   <a:tcPr anchor="ctr" marL="73152" marR="73152">
                     <a:lnL w="9525" cap="flat" cmpd="sng" algn="ctr">
                       <a:solidFill>
-                        <a:srgbClr val="D0F1DA"/>
+                        <a:srgbClr val="D4F7DE"/>
                       </a:solidFill>
                       <a:prstDash val="solid"/>
                     </a:lnL>
                     <a:lnR w="9525" cap="flat" cmpd="sng" algn="ctr">
                       <a:solidFill>
-                        <a:srgbClr val="D0F1DA"/>
+                        <a:srgbClr val="D4F7DE"/>
                       </a:solidFill>
                       <a:prstDash val="solid"/>
                     </a:lnR>
                     <a:lnT w="9525" cap="flat" cmpd="sng" algn="ctr">
                       <a:solidFill>
-                        <a:srgbClr val="D0F1DA"/>
+                        <a:srgbClr val="D4F7DE"/>
                       </a:solidFill>
                       <a:prstDash val="solid"/>
                     </a:lnT>
                     <a:lnB w="9525" cap="flat" cmpd="sng" algn="ctr">
                       <a:solidFill>
-                        <a:srgbClr val="D0F1DA"/>
+                        <a:srgbClr val="D4F7DE"/>
                       </a:solidFill>
                       <a:prstDash val="solid"/>
                     </a:lnB>
@@ -6459,25 +6459,25 @@
                   <a:tcPr anchor="ctr" marL="73152" marR="73152">
                     <a:lnL w="9525" cap="flat" cmpd="sng" algn="ctr">
                       <a:solidFill>
-                        <a:srgbClr val="D0F1DA"/>
+                        <a:srgbClr val="D4F7DE"/>
                       </a:solidFill>
                       <a:prstDash val="solid"/>
                     </a:lnL>
                     <a:lnR w="9525" cap="flat" cmpd="sng" algn="ctr">
                       <a:solidFill>
-                        <a:srgbClr val="D0F1DA"/>
+                        <a:srgbClr val="D4F7DE"/>
                       </a:solidFill>
                       <a:prstDash val="solid"/>
                     </a:lnR>
                     <a:lnT w="9525" cap="flat" cmpd="sng" algn="ctr">
                       <a:solidFill>
-                        <a:srgbClr val="D0F1DA"/>
+                        <a:srgbClr val="D4F7DE"/>
                       </a:solidFill>
                       <a:prstDash val="solid"/>
                     </a:lnT>
                     <a:lnB w="9525" cap="flat" cmpd="sng" algn="ctr">
                       <a:solidFill>
-                        <a:srgbClr val="D0F1DA"/>
+                        <a:srgbClr val="D4F7DE"/>
                       </a:solidFill>
                       <a:prstDash val="solid"/>
                     </a:lnB>
@@ -6563,7 +6563,7 @@
             <a:r>
               <a:rPr sz="3600" b="1" i="0">
                 <a:solidFill>
-                  <a:srgbClr val="143D21"/>
+                  <a:srgbClr val="1D7236"/>
                 </a:solidFill>
               </a:rPr>
               <a:t>감사합니다</a:t>
@@ -6601,7 +6601,7 @@
             <a:r>
               <a:rPr sz="1700" b="0" i="1">
                 <a:solidFill>
-                  <a:srgbClr val="143D21"/>
+                  <a:srgbClr val="1D7236"/>
                 </a:solidFill>
               </a:rPr>
               <a:t>끝까지 들어 주셔서 고맙습니다</a:t>
@@ -6666,34 +6666,34 @@
         <a:sysClr val="window" lastClr="FFFFFF"/>
       </a:lt1>
       <a:dk2>
-        <a:srgbClr val="143D21"/>
+        <a:srgbClr val="1D7236"/>
       </a:dk2>
       <a:lt2>
-        <a:srgbClr val="F0FAF3"/>
+        <a:srgbClr val="F3FCF6"/>
       </a:lt2>
       <a:accent1>
-        <a:srgbClr val="2B8245"/>
+        <a:srgbClr val="43D66F"/>
       </a:accent1>
       <a:accent2>
-        <a:srgbClr val="803B91"/>
+        <a:srgbClr val="339941"/>
       </a:accent2>
       <a:accent3>
-        <a:srgbClr val="143D21"/>
+        <a:srgbClr val="1D7236"/>
       </a:accent3>
       <a:accent4>
-        <a:srgbClr val="D0F1DA"/>
+        <a:srgbClr val="D4F7DE"/>
       </a:accent4>
       <a:accent5>
-        <a:srgbClr val="565E6B"/>
+        <a:srgbClr val="3BB858"/>
       </a:accent5>
       <a:accent6>
-        <a:srgbClr val="728B7A"/>
+        <a:srgbClr val="77AA86"/>
       </a:accent6>
       <a:hlink>
-        <a:srgbClr val="2B8245"/>
+        <a:srgbClr val="43D66F"/>
       </a:hlink>
       <a:folHlink>
-        <a:srgbClr val="143D21"/>
+        <a:srgbClr val="1D7236"/>
       </a:folHlink>
     </a:clrScheme>
     <a:fontScheme name="Office">
